--- a/SEMS_功能介绍.pptx
+++ b/SEMS_功能介绍.pptx
@@ -25,6 +25,9 @@
     <p:sldId id="273" r:id="rId24"/>
     <p:sldId id="274" r:id="rId25"/>
     <p:sldId id="275" r:id="rId26"/>
+    <p:sldId id="276" r:id="rId27"/>
+    <p:sldId id="277" r:id="rId28"/>
+    <p:sldId id="278" r:id="rId29"/>
   </p:sldIdLst>
   <p:sldSz cx="12191695" cy="6858000" type="screen4x3"/>
   <p:notesSz cx="6858000" cy="9144000"/>
@@ -4045,7 +4048,7 @@
               </a:defRPr>
             </a:pPr>
             <a:r>
-              <a:t>OEE 分析</a:t>
+              <a:t>文控系统 - 审批链</a:t>
             </a:r>
           </a:p>
         </p:txBody>
@@ -4080,14 +4083,14 @@
               </a:defRPr>
             </a:pPr>
             <a:r>
-              <a:t>OEE Analysis</a:t>
+              <a:t>Document Control - Approval Chain</a:t>
             </a:r>
           </a:p>
         </p:txBody>
       </p:sp>
       <p:pic>
         <p:nvPicPr>
-          <p:cNvPr id="5" name="Picture 4" descr="09_oee.png"/>
+          <p:cNvPr id="5" name="Picture 4" descr="08_process_docs.png"/>
           <p:cNvPicPr>
             <a:picLocks noChangeAspect="1"/>
           </p:cNvPicPr>
@@ -4223,7 +4226,7 @@
               </a:defRPr>
             </a:pPr>
             <a:r>
-              <a:t>  设备综合效率统计（可用性 × 性能 × 质量）</a:t>
+              <a:t>  三级电子签名：编制提交→审核→批准生效</a:t>
             </a:r>
           </a:p>
           <a:p>
@@ -4241,7 +4244,7 @@
               </a:defRPr>
             </a:pPr>
             <a:r>
-              <a:t>  按日/周/月维度趋势图展示</a:t>
+              <a:t>  每次签署需二次密码校验 + SHA256 签名指纹</a:t>
             </a:r>
           </a:p>
           <a:p>
@@ -4259,7 +4262,7 @@
               </a:defRPr>
             </a:pPr>
             <a:r>
-              <a:t>  设备对比分析视图</a:t>
+              <a:t>  状态机白名单：草稿→审核中→生效→作废</a:t>
             </a:r>
           </a:p>
           <a:p>
@@ -4277,7 +4280,7 @@
               </a:defRPr>
             </a:pPr>
             <a:r>
-              <a:t>  OEE 组成拆解，瓶颈定位</a:t>
+              <a:t>  驳回路径：退回草稿 + 强制填写原因</a:t>
             </a:r>
           </a:p>
         </p:txBody>
@@ -4373,7 +4376,7 @@
               </a:defRPr>
             </a:pPr>
             <a:r>
-              <a:t>品管工具 (8D/FMEA)</a:t>
+              <a:t>文控系统 - 受控管理</a:t>
             </a:r>
           </a:p>
         </p:txBody>
@@ -4408,14 +4411,14 @@
               </a:defRPr>
             </a:pPr>
             <a:r>
-              <a:t>Quality Tools</a:t>
+              <a:t>Document Control - Distribution</a:t>
             </a:r>
           </a:p>
         </p:txBody>
       </p:sp>
       <p:pic>
         <p:nvPicPr>
-          <p:cNvPr id="5" name="Picture 4" descr="10_quality.png"/>
+          <p:cNvPr id="5" name="Picture 4" descr="08_process_docs.png"/>
           <p:cNvPicPr>
             <a:picLocks noChangeAspect="1"/>
           </p:cNvPicPr>
@@ -4551,7 +4554,7 @@
               </a:defRPr>
             </a:pPr>
             <a:r>
-              <a:t>  8D 报告：结构化问题分析与解决</a:t>
+              <a:t>  修订记录：字段级 before/after 对比 + 变更原因</a:t>
             </a:r>
           </a:p>
           <a:p>
@@ -4569,7 +4572,7 @@
               </a:defRPr>
             </a:pPr>
             <a:r>
-              <a:t>  FMEA 分析：失效模式与影响分析</a:t>
+              <a:t>  分发收回台账：USER/DEPT 批量分发 + 收回记录</a:t>
             </a:r>
           </a:p>
           <a:p>
@@ -4587,7 +4590,7 @@
               </a:defRPr>
             </a:pPr>
             <a:r>
-              <a:t>  可靠性指标：MTBF / MTTR 统计</a:t>
+              <a:t>  PDF 下载自动加盖受控章（编号+状态+用户+日期）</a:t>
             </a:r>
           </a:p>
           <a:p>
@@ -4605,7 +4608,7 @@
               </a:defRPr>
             </a:pPr>
             <a:r>
-              <a:t>  按设备关联品质事件</a:t>
+              <a:t>  复审周期告警：30 天内到期 / 已过期 Badge</a:t>
             </a:r>
           </a:p>
         </p:txBody>
@@ -4701,7 +4704,7 @@
               </a:defRPr>
             </a:pPr>
             <a:r>
-              <a:t>环境核查</a:t>
+              <a:t>文控系统 - 表单审核</a:t>
             </a:r>
           </a:p>
         </p:txBody>
@@ -4736,14 +4739,14 @@
               </a:defRPr>
             </a:pPr>
             <a:r>
-              <a:t>Environment Monitoring</a:t>
+              <a:t>Document Control - Form Audit</a:t>
             </a:r>
           </a:p>
         </p:txBody>
       </p:sp>
       <p:pic>
         <p:nvPicPr>
-          <p:cNvPr id="5" name="Picture 4" descr="11_environment.png"/>
+          <p:cNvPr id="5" name="Picture 4" descr="08_process_docs.png"/>
           <p:cNvPicPr>
             <a:picLocks noChangeAspect="1"/>
           </p:cNvPicPr>
@@ -4879,7 +4882,7 @@
               </a:defRPr>
             </a:pPr>
             <a:r>
-              <a:t>  温湿度、洁净度等环境参数记录</a:t>
+              <a:t>  表单审核锁定：已审核记录禁止原地修改</a:t>
             </a:r>
           </a:p>
           <a:p>
@@ -4897,7 +4900,7 @@
               </a:defRPr>
             </a:pPr>
             <a:r>
-              <a:t>  按时间段查询历史数据</a:t>
+              <a:t>  附加修正流程：PENDING→APPROVED + 密码校验</a:t>
             </a:r>
           </a:p>
           <a:p>
@@ -4915,7 +4918,7 @@
               </a:defRPr>
             </a:pPr>
             <a:r>
-              <a:t>  异常数据自动标记</a:t>
+              <a:t>  记录原值/修正值/修正原因全链路追溯</a:t>
             </a:r>
           </a:p>
           <a:p>
@@ -4933,7 +4936,7 @@
               </a:defRPr>
             </a:pPr>
             <a:r>
-              <a:t>  支持按区域筛选</a:t>
+              <a:t>  QA 角色权限：独立于工艺员，审核批准分离</a:t>
             </a:r>
           </a:p>
         </p:txBody>
@@ -5029,7 +5032,7 @@
               </a:defRPr>
             </a:pPr>
             <a:r>
-              <a:t>人员管理</a:t>
+              <a:t>OEE 分析</a:t>
             </a:r>
           </a:p>
         </p:txBody>
@@ -5064,14 +5067,14 @@
               </a:defRPr>
             </a:pPr>
             <a:r>
-              <a:t>Personnel Management</a:t>
+              <a:t>OEE Analysis</a:t>
             </a:r>
           </a:p>
         </p:txBody>
       </p:sp>
       <p:pic>
         <p:nvPicPr>
-          <p:cNvPr id="5" name="Picture 4" descr="12_personnel.png"/>
+          <p:cNvPr id="5" name="Picture 4" descr="09_oee.png"/>
           <p:cNvPicPr>
             <a:picLocks noChangeAspect="1"/>
           </p:cNvPicPr>
@@ -5207,7 +5210,7 @@
               </a:defRPr>
             </a:pPr>
             <a:r>
-              <a:t>  资质考核：设备操作等级认证（主操作/副操作/培训中）</a:t>
+              <a:t>  设备综合效率统计（可用性 × 性能 × 质量）</a:t>
             </a:r>
           </a:p>
           <a:p>
@@ -5225,7 +5228,7 @@
               </a:defRPr>
             </a:pPr>
             <a:r>
-              <a:t>  技能矩阵：人员与设备技能匹配一览</a:t>
+              <a:t>  按日/周/月维度趋势图展示</a:t>
             </a:r>
           </a:p>
           <a:p>
@@ -5243,7 +5246,7 @@
               </a:defRPr>
             </a:pPr>
             <a:r>
-              <a:t>  培训计划：计划制定与执行跟踪</a:t>
+              <a:t>  设备对比分析视图</a:t>
             </a:r>
           </a:p>
           <a:p>
@@ -5261,7 +5264,7 @@
               </a:defRPr>
             </a:pPr>
             <a:r>
-              <a:t>  资质到期自动提醒</a:t>
+              <a:t>  OEE 组成拆解，瓶颈定位</a:t>
             </a:r>
           </a:p>
         </p:txBody>
@@ -5357,7 +5360,7 @@
               </a:defRPr>
             </a:pPr>
             <a:r>
-              <a:t>资产管理</a:t>
+              <a:t>品管工具 (8D/FMEA)</a:t>
             </a:r>
           </a:p>
         </p:txBody>
@@ -5392,14 +5395,14 @@
               </a:defRPr>
             </a:pPr>
             <a:r>
-              <a:t>Asset Management</a:t>
+              <a:t>Quality Tools</a:t>
             </a:r>
           </a:p>
         </p:txBody>
       </p:sp>
       <p:pic>
         <p:nvPicPr>
-          <p:cNvPr id="5" name="Picture 4" descr="13_asset.png"/>
+          <p:cNvPr id="5" name="Picture 4" descr="10_quality.png"/>
           <p:cNvPicPr>
             <a:picLocks noChangeAspect="1"/>
           </p:cNvPicPr>
@@ -5535,7 +5538,7 @@
               </a:defRPr>
             </a:pPr>
             <a:r>
-              <a:t>  资产盘点：创建盘点计划，逐项核查</a:t>
+              <a:t>  8D 报告：结构化问题分析与解决</a:t>
             </a:r>
           </a:p>
           <a:p>
@@ -5553,7 +5556,7 @@
               </a:defRPr>
             </a:pPr>
             <a:r>
-              <a:t>  调拨报废申请：资产变动流程管理</a:t>
+              <a:t>  FMEA 分析：失效模式与影响分析</a:t>
             </a:r>
           </a:p>
           <a:p>
@@ -5571,7 +5574,7 @@
               </a:defRPr>
             </a:pPr>
             <a:r>
-              <a:t>  盘点进度可视化（如 10/10 完成）</a:t>
+              <a:t>  可靠性指标：MTBF / MTTR 统计</a:t>
             </a:r>
           </a:p>
           <a:p>
@@ -5589,7 +5592,7 @@
               </a:defRPr>
             </a:pPr>
             <a:r>
-              <a:t>  盘点历史可追溯</a:t>
+              <a:t>  按设备关联品质事件</a:t>
             </a:r>
           </a:p>
         </p:txBody>
@@ -5685,7 +5688,7 @@
               </a:defRPr>
             </a:pPr>
             <a:r>
-              <a:t>安全加固 &amp; 灾备方案</a:t>
+              <a:t>环境核查</a:t>
             </a:r>
           </a:p>
         </p:txBody>
@@ -5720,14 +5723,14 @@
               </a:defRPr>
             </a:pPr>
             <a:r>
-              <a:t>Security &amp; Disaster Recovery</a:t>
+              <a:t>Environment Monitoring</a:t>
             </a:r>
           </a:p>
         </p:txBody>
       </p:sp>
       <p:pic>
         <p:nvPicPr>
-          <p:cNvPr id="5" name="Picture 4" descr="14_system_config.png"/>
+          <p:cNvPr id="5" name="Picture 4" descr="11_environment.png"/>
           <p:cNvPicPr>
             <a:picLocks noChangeAspect="1"/>
           </p:cNvPicPr>
@@ -5863,7 +5866,7 @@
               </a:defRPr>
             </a:pPr>
             <a:r>
-              <a:t>  局域网安全：密码策略/账户锁定/JWT双令牌/IP白名单</a:t>
+              <a:t>  温湿度、洁净度等环境参数记录</a:t>
             </a:r>
           </a:p>
           <a:p>
@@ -5881,7 +5884,7 @@
               </a:defRPr>
             </a:pPr>
             <a:r>
-              <a:t>  3-2-1 灾备：AES加密 + NAS异地副本 + U盘冷备</a:t>
+              <a:t>  按时间段查询历史数据</a:t>
             </a:r>
           </a:p>
           <a:p>
@@ -5899,7 +5902,7 @@
               </a:defRPr>
             </a:pPr>
             <a:r>
-              <a:t>  备份还原烟雾测试（每次备份都知道能不能还原）</a:t>
+              <a:t>  异常数据自动标记</a:t>
             </a:r>
           </a:p>
           <a:p>
@@ -5917,7 +5920,7 @@
               </a:defRPr>
             </a:pPr>
             <a:r>
-              <a:t>  敏感操作审计日志（登录/改密/恢复等）</a:t>
+              <a:t>  支持按区域筛选</a:t>
             </a:r>
           </a:p>
         </p:txBody>
@@ -6013,7 +6016,7 @@
               </a:defRPr>
             </a:pPr>
             <a:r>
-              <a:t>服务守护 &amp; 自启动</a:t>
+              <a:t>人员管理</a:t>
             </a:r>
           </a:p>
         </p:txBody>
@@ -6048,14 +6051,14 @@
               </a:defRPr>
             </a:pPr>
             <a:r>
-              <a:t>Service Robustness</a:t>
+              <a:t>Personnel Management</a:t>
             </a:r>
           </a:p>
         </p:txBody>
       </p:sp>
       <p:pic>
         <p:nvPicPr>
-          <p:cNvPr id="5" name="Picture 4" descr="14_system_config.png"/>
+          <p:cNvPr id="5" name="Picture 4" descr="12_personnel.png"/>
           <p:cNvPicPr>
             <a:picLocks noChangeAspect="1"/>
           </p:cNvPicPr>
@@ -6191,7 +6194,7 @@
               </a:defRPr>
             </a:pPr>
             <a:r>
-              <a:t>  4 套守护方案：systemd / NSSM / Docker / 看门狗</a:t>
+              <a:t>  资质考核：设备操作等级认证（主操作/副操作/培训中）</a:t>
             </a:r>
           </a:p>
           <a:p>
@@ -6209,7 +6212,7 @@
               </a:defRPr>
             </a:pPr>
             <a:r>
-              <a:t>  开机自启：systemd WantedBy / NSSM 延迟启动 / cron @reboot</a:t>
+              <a:t>  技能矩阵：人员与设备技能匹配一览</a:t>
             </a:r>
           </a:p>
           <a:p>
@@ -6227,7 +6230,7 @@
               </a:defRPr>
             </a:pPr>
             <a:r>
-              <a:t>  崩溃自重启：on-failure / NSSM restart / watchdog tick</a:t>
+              <a:t>  培训计划：计划制定与执行跟踪</a:t>
             </a:r>
           </a:p>
           <a:p>
@@ -6245,7 +6248,7 @@
               </a:defRPr>
             </a:pPr>
             <a:r>
-              <a:t>  健康检查兜底：每 2 分钟检测，连续失败 3 次自动重启</a:t>
+              <a:t>  资质到期自动提醒</a:t>
             </a:r>
           </a:p>
         </p:txBody>
@@ -6341,7 +6344,7 @@
               </a:defRPr>
             </a:pPr>
             <a:r>
-              <a:t>系统配置</a:t>
+              <a:t>资产管理</a:t>
             </a:r>
           </a:p>
         </p:txBody>
@@ -6376,14 +6379,14 @@
               </a:defRPr>
             </a:pPr>
             <a:r>
-              <a:t>System Configuration</a:t>
+              <a:t>Asset Management</a:t>
             </a:r>
           </a:p>
         </p:txBody>
       </p:sp>
       <p:pic>
         <p:nvPicPr>
-          <p:cNvPr id="5" name="Picture 4" descr="14_system_config.png"/>
+          <p:cNvPr id="5" name="Picture 4" descr="13_asset.png"/>
           <p:cNvPicPr>
             <a:picLocks noChangeAspect="1"/>
           </p:cNvPicPr>
@@ -6519,7 +6522,7 @@
               </a:defRPr>
             </a:pPr>
             <a:r>
-              <a:t>  字典管理：自定义厂区、区域、状态等选项</a:t>
+              <a:t>  资产盘点：创建盘点计划，逐项核查</a:t>
             </a:r>
           </a:p>
           <a:p>
@@ -6537,7 +6540,7 @@
               </a:defRPr>
             </a:pPr>
             <a:r>
-              <a:t>  角色权限：精细化角色权限矩阵</a:t>
+              <a:t>  调拨报废申请：资产变动流程管理</a:t>
             </a:r>
           </a:p>
           <a:p>
@@ -6555,7 +6558,7 @@
               </a:defRPr>
             </a:pPr>
             <a:r>
-              <a:t>  用户管理：账号创建、强制改密、账户解锁</a:t>
+              <a:t>  盘点进度可视化（如 10/10 完成）</a:t>
             </a:r>
           </a:p>
           <a:p>
@@ -6573,7 +6576,7 @@
               </a:defRPr>
             </a:pPr>
             <a:r>
-              <a:t>  定时备份计划、一键备份/加密/恢复</a:t>
+              <a:t>  盘点历史可追溯</a:t>
             </a:r>
           </a:p>
         </p:txBody>
@@ -7608,7 +7611,7 @@
               </a:defRPr>
             </a:pPr>
             <a:r>
-              <a:t>OEE 分析</a:t>
+              <a:t>文控系统</a:t>
             </a:r>
           </a:p>
         </p:txBody>
@@ -7643,7 +7646,7 @@
               </a:defRPr>
             </a:pPr>
             <a:r>
-              <a:t>效率统计</a:t>
+              <a:t>审批链+受控章</a:t>
             </a:r>
           </a:p>
         </p:txBody>
@@ -7721,7 +7724,7 @@
               </a:defRPr>
             </a:pPr>
             <a:r>
-              <a:t>品管工具</a:t>
+              <a:t>OEE 分析</a:t>
             </a:r>
           </a:p>
         </p:txBody>
@@ -7756,7 +7759,7 @@
               </a:defRPr>
             </a:pPr>
             <a:r>
-              <a:t>8D / FMEA</a:t>
+              <a:t>效率统计</a:t>
             </a:r>
           </a:p>
         </p:txBody>
@@ -7834,7 +7837,7 @@
               </a:defRPr>
             </a:pPr>
             <a:r>
-              <a:t>环境核查</a:t>
+              <a:t>品管工具</a:t>
             </a:r>
           </a:p>
         </p:txBody>
@@ -7869,7 +7872,7 @@
               </a:defRPr>
             </a:pPr>
             <a:r>
-              <a:t>参数监控</a:t>
+              <a:t>8D / FMEA</a:t>
             </a:r>
           </a:p>
         </p:txBody>
@@ -7947,7 +7950,7 @@
               </a:defRPr>
             </a:pPr>
             <a:r>
-              <a:t>人员管理</a:t>
+              <a:t>环境核查</a:t>
             </a:r>
           </a:p>
         </p:txBody>
@@ -7982,7 +7985,7 @@
               </a:defRPr>
             </a:pPr>
             <a:r>
-              <a:t>资质与培训</a:t>
+              <a:t>参数监控</a:t>
             </a:r>
           </a:p>
         </p:txBody>
@@ -8060,7 +8063,7 @@
               </a:defRPr>
             </a:pPr>
             <a:r>
-              <a:t>资产管理</a:t>
+              <a:t>人员管理</a:t>
             </a:r>
           </a:p>
         </p:txBody>
@@ -8095,7 +8098,7 @@
               </a:defRPr>
             </a:pPr>
             <a:r>
-              <a:t>盘点与调拨</a:t>
+              <a:t>资质与培训</a:t>
             </a:r>
           </a:p>
         </p:txBody>
@@ -8173,7 +8176,7 @@
               </a:defRPr>
             </a:pPr>
             <a:r>
-              <a:t>安全灾备</a:t>
+              <a:t>资产管理</a:t>
             </a:r>
           </a:p>
         </p:txBody>
@@ -8208,7 +8211,7 @@
               </a:defRPr>
             </a:pPr>
             <a:r>
-              <a:t>加固+3-2-1备份</a:t>
+              <a:t>盘点与调拨</a:t>
             </a:r>
           </a:p>
         </p:txBody>
@@ -8286,7 +8289,7 @@
               </a:defRPr>
             </a:pPr>
             <a:r>
-              <a:t>服务守护</a:t>
+              <a:t>安全灾备</a:t>
             </a:r>
           </a:p>
         </p:txBody>
@@ -8321,7 +8324,7 @@
               </a:defRPr>
             </a:pPr>
             <a:r>
-              <a:t>自启+崩溃重启</a:t>
+              <a:t>加固+3-2-1备份</a:t>
             </a:r>
           </a:p>
         </p:txBody>
@@ -8399,7 +8402,7 @@
               </a:defRPr>
             </a:pPr>
             <a:r>
-              <a:t>系统配置</a:t>
+              <a:t>服务守护</a:t>
             </a:r>
           </a:p>
         </p:txBody>
@@ -8413,6 +8416,119 @@
         <p:spPr>
           <a:xfrm>
             <a:off x="8823960" y="5989320"/>
+            <a:ext cx="2194560" cy="457200"/>
+          </a:xfrm>
+          <a:prstGeom prst="rect">
+            <a:avLst/>
+          </a:prstGeom>
+          <a:noFill/>
+        </p:spPr>
+        <p:txBody>
+          <a:bodyPr wrap="none">
+            <a:spAutoFit/>
+          </a:bodyPr>
+          <a:lstStyle/>
+          <a:p>
+            <a:pPr>
+              <a:defRPr sz="1100">
+                <a:solidFill>
+                  <a:srgbClr val="606060"/>
+                </a:solidFill>
+              </a:defRPr>
+            </a:pPr>
+            <a:r>
+              <a:t>自启+崩溃重启</a:t>
+            </a:r>
+          </a:p>
+        </p:txBody>
+      </p:sp>
+      <p:sp>
+        <p:nvSpPr>
+          <p:cNvPr id="51" name="Rectangle 50"/>
+          <p:cNvSpPr/>
+          <p:nvPr/>
+        </p:nvSpPr>
+        <p:spPr>
+          <a:xfrm>
+            <a:off x="548640" y="6766560"/>
+            <a:ext cx="2560320" cy="1188720"/>
+          </a:xfrm>
+          <a:prstGeom prst="rect">
+            <a:avLst/>
+          </a:prstGeom>
+          <a:solidFill>
+            <a:srgbClr val="F5F7FA"/>
+          </a:solidFill>
+          <a:ln>
+            <a:noFill/>
+          </a:ln>
+        </p:spPr>
+        <p:style>
+          <a:lnRef idx="1">
+            <a:schemeClr val="accent1"/>
+          </a:lnRef>
+          <a:fillRef idx="3">
+            <a:schemeClr val="accent1"/>
+          </a:fillRef>
+          <a:effectRef idx="2">
+            <a:schemeClr val="accent1"/>
+          </a:effectRef>
+          <a:fontRef idx="minor">
+            <a:schemeClr val="lt1"/>
+          </a:fontRef>
+        </p:style>
+        <p:txBody>
+          <a:bodyPr rtlCol="0" anchor="ctr"/>
+          <a:lstStyle/>
+          <a:p>
+            <a:pPr algn="ctr"/>
+          </a:p>
+        </p:txBody>
+      </p:sp>
+      <p:sp>
+        <p:nvSpPr>
+          <p:cNvPr id="52" name="TextBox 51"/>
+          <p:cNvSpPr txBox="1"/>
+          <p:nvPr/>
+        </p:nvSpPr>
+        <p:spPr>
+          <a:xfrm>
+            <a:off x="731520" y="6903720"/>
+            <a:ext cx="2194560" cy="457200"/>
+          </a:xfrm>
+          <a:prstGeom prst="rect">
+            <a:avLst/>
+          </a:prstGeom>
+          <a:noFill/>
+        </p:spPr>
+        <p:txBody>
+          <a:bodyPr wrap="none">
+            <a:spAutoFit/>
+          </a:bodyPr>
+          <a:lstStyle/>
+          <a:p>
+            <a:pPr>
+              <a:defRPr sz="1600" b="1">
+                <a:solidFill>
+                  <a:srgbClr val="0B3D91"/>
+                </a:solidFill>
+              </a:defRPr>
+            </a:pPr>
+            <a:r>
+              <a:t>系统配置</a:t>
+            </a:r>
+          </a:p>
+        </p:txBody>
+      </p:sp>
+      <p:sp>
+        <p:nvSpPr>
+          <p:cNvPr id="53" name="TextBox 52"/>
+          <p:cNvSpPr txBox="1"/>
+          <p:nvPr/>
+        </p:nvSpPr>
+        <p:spPr>
+          <a:xfrm>
+            <a:off x="731520" y="7360920"/>
             <a:ext cx="2194560" cy="457200"/>
           </a:xfrm>
           <a:prstGeom prst="rect">
@@ -8448,6 +8564,990 @@
 </file>
 
 <file path=ppt/slides/slide20.xml><?xml version="1.0" encoding="utf-8"?>
+<p:sld xmlns:a="http://schemas.openxmlformats.org/drawingml/2006/main" xmlns:p="http://schemas.openxmlformats.org/presentationml/2006/main" xmlns:r="http://schemas.openxmlformats.org/officeDocument/2006/relationships">
+  <p:cSld>
+    <p:spTree>
+      <p:nvGrpSpPr>
+        <p:cNvPr id="1" name=""/>
+        <p:cNvGrpSpPr/>
+        <p:nvPr/>
+      </p:nvGrpSpPr>
+      <p:grpSpPr/>
+      <p:sp>
+        <p:nvSpPr>
+          <p:cNvPr id="2" name="Rectangle 1"/>
+          <p:cNvSpPr/>
+          <p:nvPr/>
+        </p:nvSpPr>
+        <p:spPr>
+          <a:xfrm>
+            <a:off x="0" y="0"/>
+            <a:ext cx="12191695" cy="914400"/>
+          </a:xfrm>
+          <a:prstGeom prst="rect">
+            <a:avLst/>
+          </a:prstGeom>
+          <a:solidFill>
+            <a:srgbClr val="0B3D91"/>
+          </a:solidFill>
+          <a:ln>
+            <a:noFill/>
+          </a:ln>
+        </p:spPr>
+        <p:style>
+          <a:lnRef idx="1">
+            <a:schemeClr val="accent1"/>
+          </a:lnRef>
+          <a:fillRef idx="3">
+            <a:schemeClr val="accent1"/>
+          </a:fillRef>
+          <a:effectRef idx="2">
+            <a:schemeClr val="accent1"/>
+          </a:effectRef>
+          <a:fontRef idx="minor">
+            <a:schemeClr val="lt1"/>
+          </a:fontRef>
+        </p:style>
+        <p:txBody>
+          <a:bodyPr rtlCol="0" anchor="ctr"/>
+          <a:lstStyle/>
+          <a:p>
+            <a:pPr algn="ctr"/>
+          </a:p>
+        </p:txBody>
+      </p:sp>
+      <p:sp>
+        <p:nvSpPr>
+          <p:cNvPr id="3" name="TextBox 2"/>
+          <p:cNvSpPr txBox="1"/>
+          <p:nvPr/>
+        </p:nvSpPr>
+        <p:spPr>
+          <a:xfrm>
+            <a:off x="457200" y="137160"/>
+            <a:ext cx="7315200" cy="640080"/>
+          </a:xfrm>
+          <a:prstGeom prst="rect">
+            <a:avLst/>
+          </a:prstGeom>
+          <a:noFill/>
+        </p:spPr>
+        <p:txBody>
+          <a:bodyPr wrap="none">
+            <a:spAutoFit/>
+          </a:bodyPr>
+          <a:lstStyle/>
+          <a:p>
+            <a:pPr>
+              <a:defRPr sz="2800" b="1">
+                <a:solidFill>
+                  <a:srgbClr val="FFFFFF"/>
+                </a:solidFill>
+              </a:defRPr>
+            </a:pPr>
+            <a:r>
+              <a:t>安全加固 &amp; 灾备方案</a:t>
+            </a:r>
+          </a:p>
+        </p:txBody>
+      </p:sp>
+      <p:sp>
+        <p:nvSpPr>
+          <p:cNvPr id="4" name="TextBox 3"/>
+          <p:cNvSpPr txBox="1"/>
+          <p:nvPr/>
+        </p:nvSpPr>
+        <p:spPr>
+          <a:xfrm>
+            <a:off x="457200" y="502920"/>
+            <a:ext cx="7315200" cy="365760"/>
+          </a:xfrm>
+          <a:prstGeom prst="rect">
+            <a:avLst/>
+          </a:prstGeom>
+          <a:noFill/>
+        </p:spPr>
+        <p:txBody>
+          <a:bodyPr wrap="none">
+            <a:spAutoFit/>
+          </a:bodyPr>
+          <a:lstStyle/>
+          <a:p>
+            <a:pPr>
+              <a:defRPr sz="1200">
+                <a:solidFill>
+                  <a:srgbClr val="90CAF9"/>
+                </a:solidFill>
+              </a:defRPr>
+            </a:pPr>
+            <a:r>
+              <a:t>Security &amp; Disaster Recovery</a:t>
+            </a:r>
+          </a:p>
+        </p:txBody>
+      </p:sp>
+      <p:pic>
+        <p:nvPicPr>
+          <p:cNvPr id="5" name="Picture 4" descr="14_system_config.png"/>
+          <p:cNvPicPr>
+            <a:picLocks noChangeAspect="1"/>
+          </p:cNvPicPr>
+          <p:nvPr/>
+        </p:nvPicPr>
+        <p:blipFill>
+          <a:blip r:embed="rId2"/>
+          <a:stretch>
+            <a:fillRect/>
+          </a:stretch>
+        </p:blipFill>
+        <p:spPr>
+          <a:xfrm>
+            <a:off x="365760" y="1325880"/>
+            <a:ext cx="4613141" cy="5029200"/>
+          </a:xfrm>
+          <a:prstGeom prst="rect">
+            <a:avLst/>
+          </a:prstGeom>
+        </p:spPr>
+      </p:pic>
+      <p:sp>
+        <p:nvSpPr>
+          <p:cNvPr id="6" name="Rectangle 5"/>
+          <p:cNvSpPr/>
+          <p:nvPr/>
+        </p:nvSpPr>
+        <p:spPr>
+          <a:xfrm>
+            <a:off x="8321040" y="1097280"/>
+            <a:ext cx="3657600" cy="5303520"/>
+          </a:xfrm>
+          <a:prstGeom prst="rect">
+            <a:avLst/>
+          </a:prstGeom>
+          <a:solidFill>
+            <a:srgbClr val="F5F7FA"/>
+          </a:solidFill>
+          <a:ln>
+            <a:noFill/>
+          </a:ln>
+        </p:spPr>
+        <p:style>
+          <a:lnRef idx="1">
+            <a:schemeClr val="accent1"/>
+          </a:lnRef>
+          <a:fillRef idx="3">
+            <a:schemeClr val="accent1"/>
+          </a:fillRef>
+          <a:effectRef idx="2">
+            <a:schemeClr val="accent1"/>
+          </a:effectRef>
+          <a:fontRef idx="minor">
+            <a:schemeClr val="lt1"/>
+          </a:fontRef>
+        </p:style>
+        <p:txBody>
+          <a:bodyPr rtlCol="0" anchor="ctr"/>
+          <a:lstStyle/>
+          <a:p>
+            <a:pPr algn="ctr"/>
+          </a:p>
+        </p:txBody>
+      </p:sp>
+      <p:sp>
+        <p:nvSpPr>
+          <p:cNvPr id="7" name="TextBox 6"/>
+          <p:cNvSpPr txBox="1"/>
+          <p:nvPr/>
+        </p:nvSpPr>
+        <p:spPr>
+          <a:xfrm>
+            <a:off x="8412480" y="1280160"/>
+            <a:ext cx="3474720" cy="457200"/>
+          </a:xfrm>
+          <a:prstGeom prst="rect">
+            <a:avLst/>
+          </a:prstGeom>
+          <a:noFill/>
+        </p:spPr>
+        <p:txBody>
+          <a:bodyPr wrap="none">
+            <a:spAutoFit/>
+          </a:bodyPr>
+          <a:lstStyle/>
+          <a:p>
+            <a:pPr>
+              <a:defRPr sz="1800" b="1">
+                <a:solidFill>
+                  <a:srgbClr val="0B3D91"/>
+                </a:solidFill>
+              </a:defRPr>
+            </a:pPr>
+            <a:r>
+              <a:t>功能亮点</a:t>
+            </a:r>
+          </a:p>
+        </p:txBody>
+      </p:sp>
+      <p:sp>
+        <p:nvSpPr>
+          <p:cNvPr id="8" name="TextBox 7"/>
+          <p:cNvSpPr txBox="1"/>
+          <p:nvPr/>
+        </p:nvSpPr>
+        <p:spPr>
+          <a:xfrm>
+            <a:off x="8412480" y="1828800"/>
+            <a:ext cx="3474720" cy="4572000"/>
+          </a:xfrm>
+          <a:prstGeom prst="rect">
+            <a:avLst/>
+          </a:prstGeom>
+          <a:noFill/>
+        </p:spPr>
+        <p:txBody>
+          <a:bodyPr wrap="square">
+            <a:spAutoFit/>
+          </a:bodyPr>
+          <a:lstStyle/>
+          <a:p>
+            <a:pPr>
+              <a:lnSpc>
+                <a:spcPts val="140"/>
+              </a:lnSpc>
+              <a:spcAft>
+                <a:spcPts val="1200"/>
+              </a:spcAft>
+              <a:defRPr sz="1300">
+                <a:solidFill>
+                  <a:srgbClr val="1A1A2E"/>
+                </a:solidFill>
+              </a:defRPr>
+            </a:pPr>
+            <a:r>
+              <a:t>  局域网安全：密码策略/账户锁定/JWT双令牌/IP白名单</a:t>
+            </a:r>
+          </a:p>
+          <a:p>
+            <a:pPr>
+              <a:lnSpc>
+                <a:spcPts val="140"/>
+              </a:lnSpc>
+              <a:spcAft>
+                <a:spcPts val="1200"/>
+              </a:spcAft>
+              <a:defRPr sz="1300">
+                <a:solidFill>
+                  <a:srgbClr val="1A1A2E"/>
+                </a:solidFill>
+              </a:defRPr>
+            </a:pPr>
+            <a:r>
+              <a:t>  3-2-1 灾备：AES加密 + NAS异地副本 + U盘冷备</a:t>
+            </a:r>
+          </a:p>
+          <a:p>
+            <a:pPr>
+              <a:lnSpc>
+                <a:spcPts val="140"/>
+              </a:lnSpc>
+              <a:spcAft>
+                <a:spcPts val="1200"/>
+              </a:spcAft>
+              <a:defRPr sz="1300">
+                <a:solidFill>
+                  <a:srgbClr val="1A1A2E"/>
+                </a:solidFill>
+              </a:defRPr>
+            </a:pPr>
+            <a:r>
+              <a:t>  备份还原烟雾测试（每次备份都知道能不能还原）</a:t>
+            </a:r>
+          </a:p>
+          <a:p>
+            <a:pPr>
+              <a:lnSpc>
+                <a:spcPts val="140"/>
+              </a:lnSpc>
+              <a:spcAft>
+                <a:spcPts val="1200"/>
+              </a:spcAft>
+              <a:defRPr sz="1300">
+                <a:solidFill>
+                  <a:srgbClr val="1A1A2E"/>
+                </a:solidFill>
+              </a:defRPr>
+            </a:pPr>
+            <a:r>
+              <a:t>  敏感操作审计日志（登录/改密/恢复等）</a:t>
+            </a:r>
+          </a:p>
+        </p:txBody>
+      </p:sp>
+    </p:spTree>
+  </p:cSld>
+  <p:clrMapOvr>
+    <a:masterClrMapping/>
+  </p:clrMapOvr>
+</p:sld>
+</file>
+
+<file path=ppt/slides/slide21.xml><?xml version="1.0" encoding="utf-8"?>
+<p:sld xmlns:a="http://schemas.openxmlformats.org/drawingml/2006/main" xmlns:p="http://schemas.openxmlformats.org/presentationml/2006/main" xmlns:r="http://schemas.openxmlformats.org/officeDocument/2006/relationships">
+  <p:cSld>
+    <p:spTree>
+      <p:nvGrpSpPr>
+        <p:cNvPr id="1" name=""/>
+        <p:cNvGrpSpPr/>
+        <p:nvPr/>
+      </p:nvGrpSpPr>
+      <p:grpSpPr/>
+      <p:sp>
+        <p:nvSpPr>
+          <p:cNvPr id="2" name="Rectangle 1"/>
+          <p:cNvSpPr/>
+          <p:nvPr/>
+        </p:nvSpPr>
+        <p:spPr>
+          <a:xfrm>
+            <a:off x="0" y="0"/>
+            <a:ext cx="12191695" cy="914400"/>
+          </a:xfrm>
+          <a:prstGeom prst="rect">
+            <a:avLst/>
+          </a:prstGeom>
+          <a:solidFill>
+            <a:srgbClr val="0B3D91"/>
+          </a:solidFill>
+          <a:ln>
+            <a:noFill/>
+          </a:ln>
+        </p:spPr>
+        <p:style>
+          <a:lnRef idx="1">
+            <a:schemeClr val="accent1"/>
+          </a:lnRef>
+          <a:fillRef idx="3">
+            <a:schemeClr val="accent1"/>
+          </a:fillRef>
+          <a:effectRef idx="2">
+            <a:schemeClr val="accent1"/>
+          </a:effectRef>
+          <a:fontRef idx="minor">
+            <a:schemeClr val="lt1"/>
+          </a:fontRef>
+        </p:style>
+        <p:txBody>
+          <a:bodyPr rtlCol="0" anchor="ctr"/>
+          <a:lstStyle/>
+          <a:p>
+            <a:pPr algn="ctr"/>
+          </a:p>
+        </p:txBody>
+      </p:sp>
+      <p:sp>
+        <p:nvSpPr>
+          <p:cNvPr id="3" name="TextBox 2"/>
+          <p:cNvSpPr txBox="1"/>
+          <p:nvPr/>
+        </p:nvSpPr>
+        <p:spPr>
+          <a:xfrm>
+            <a:off x="457200" y="137160"/>
+            <a:ext cx="7315200" cy="640080"/>
+          </a:xfrm>
+          <a:prstGeom prst="rect">
+            <a:avLst/>
+          </a:prstGeom>
+          <a:noFill/>
+        </p:spPr>
+        <p:txBody>
+          <a:bodyPr wrap="none">
+            <a:spAutoFit/>
+          </a:bodyPr>
+          <a:lstStyle/>
+          <a:p>
+            <a:pPr>
+              <a:defRPr sz="2800" b="1">
+                <a:solidFill>
+                  <a:srgbClr val="FFFFFF"/>
+                </a:solidFill>
+              </a:defRPr>
+            </a:pPr>
+            <a:r>
+              <a:t>服务守护 &amp; 自启动</a:t>
+            </a:r>
+          </a:p>
+        </p:txBody>
+      </p:sp>
+      <p:sp>
+        <p:nvSpPr>
+          <p:cNvPr id="4" name="TextBox 3"/>
+          <p:cNvSpPr txBox="1"/>
+          <p:nvPr/>
+        </p:nvSpPr>
+        <p:spPr>
+          <a:xfrm>
+            <a:off x="457200" y="502920"/>
+            <a:ext cx="7315200" cy="365760"/>
+          </a:xfrm>
+          <a:prstGeom prst="rect">
+            <a:avLst/>
+          </a:prstGeom>
+          <a:noFill/>
+        </p:spPr>
+        <p:txBody>
+          <a:bodyPr wrap="none">
+            <a:spAutoFit/>
+          </a:bodyPr>
+          <a:lstStyle/>
+          <a:p>
+            <a:pPr>
+              <a:defRPr sz="1200">
+                <a:solidFill>
+                  <a:srgbClr val="90CAF9"/>
+                </a:solidFill>
+              </a:defRPr>
+            </a:pPr>
+            <a:r>
+              <a:t>Service Robustness</a:t>
+            </a:r>
+          </a:p>
+        </p:txBody>
+      </p:sp>
+      <p:pic>
+        <p:nvPicPr>
+          <p:cNvPr id="5" name="Picture 4" descr="14_system_config.png"/>
+          <p:cNvPicPr>
+            <a:picLocks noChangeAspect="1"/>
+          </p:cNvPicPr>
+          <p:nvPr/>
+        </p:nvPicPr>
+        <p:blipFill>
+          <a:blip r:embed="rId2"/>
+          <a:stretch>
+            <a:fillRect/>
+          </a:stretch>
+        </p:blipFill>
+        <p:spPr>
+          <a:xfrm>
+            <a:off x="365760" y="1325880"/>
+            <a:ext cx="4613141" cy="5029200"/>
+          </a:xfrm>
+          <a:prstGeom prst="rect">
+            <a:avLst/>
+          </a:prstGeom>
+        </p:spPr>
+      </p:pic>
+      <p:sp>
+        <p:nvSpPr>
+          <p:cNvPr id="6" name="Rectangle 5"/>
+          <p:cNvSpPr/>
+          <p:nvPr/>
+        </p:nvSpPr>
+        <p:spPr>
+          <a:xfrm>
+            <a:off x="8321040" y="1097280"/>
+            <a:ext cx="3657600" cy="5303520"/>
+          </a:xfrm>
+          <a:prstGeom prst="rect">
+            <a:avLst/>
+          </a:prstGeom>
+          <a:solidFill>
+            <a:srgbClr val="F5F7FA"/>
+          </a:solidFill>
+          <a:ln>
+            <a:noFill/>
+          </a:ln>
+        </p:spPr>
+        <p:style>
+          <a:lnRef idx="1">
+            <a:schemeClr val="accent1"/>
+          </a:lnRef>
+          <a:fillRef idx="3">
+            <a:schemeClr val="accent1"/>
+          </a:fillRef>
+          <a:effectRef idx="2">
+            <a:schemeClr val="accent1"/>
+          </a:effectRef>
+          <a:fontRef idx="minor">
+            <a:schemeClr val="lt1"/>
+          </a:fontRef>
+        </p:style>
+        <p:txBody>
+          <a:bodyPr rtlCol="0" anchor="ctr"/>
+          <a:lstStyle/>
+          <a:p>
+            <a:pPr algn="ctr"/>
+          </a:p>
+        </p:txBody>
+      </p:sp>
+      <p:sp>
+        <p:nvSpPr>
+          <p:cNvPr id="7" name="TextBox 6"/>
+          <p:cNvSpPr txBox="1"/>
+          <p:nvPr/>
+        </p:nvSpPr>
+        <p:spPr>
+          <a:xfrm>
+            <a:off x="8412480" y="1280160"/>
+            <a:ext cx="3474720" cy="457200"/>
+          </a:xfrm>
+          <a:prstGeom prst="rect">
+            <a:avLst/>
+          </a:prstGeom>
+          <a:noFill/>
+        </p:spPr>
+        <p:txBody>
+          <a:bodyPr wrap="none">
+            <a:spAutoFit/>
+          </a:bodyPr>
+          <a:lstStyle/>
+          <a:p>
+            <a:pPr>
+              <a:defRPr sz="1800" b="1">
+                <a:solidFill>
+                  <a:srgbClr val="0B3D91"/>
+                </a:solidFill>
+              </a:defRPr>
+            </a:pPr>
+            <a:r>
+              <a:t>功能亮点</a:t>
+            </a:r>
+          </a:p>
+        </p:txBody>
+      </p:sp>
+      <p:sp>
+        <p:nvSpPr>
+          <p:cNvPr id="8" name="TextBox 7"/>
+          <p:cNvSpPr txBox="1"/>
+          <p:nvPr/>
+        </p:nvSpPr>
+        <p:spPr>
+          <a:xfrm>
+            <a:off x="8412480" y="1828800"/>
+            <a:ext cx="3474720" cy="4572000"/>
+          </a:xfrm>
+          <a:prstGeom prst="rect">
+            <a:avLst/>
+          </a:prstGeom>
+          <a:noFill/>
+        </p:spPr>
+        <p:txBody>
+          <a:bodyPr wrap="square">
+            <a:spAutoFit/>
+          </a:bodyPr>
+          <a:lstStyle/>
+          <a:p>
+            <a:pPr>
+              <a:lnSpc>
+                <a:spcPts val="140"/>
+              </a:lnSpc>
+              <a:spcAft>
+                <a:spcPts val="1200"/>
+              </a:spcAft>
+              <a:defRPr sz="1300">
+                <a:solidFill>
+                  <a:srgbClr val="1A1A2E"/>
+                </a:solidFill>
+              </a:defRPr>
+            </a:pPr>
+            <a:r>
+              <a:t>  4 套守护方案：systemd / NSSM / Docker / 看门狗</a:t>
+            </a:r>
+          </a:p>
+          <a:p>
+            <a:pPr>
+              <a:lnSpc>
+                <a:spcPts val="140"/>
+              </a:lnSpc>
+              <a:spcAft>
+                <a:spcPts val="1200"/>
+              </a:spcAft>
+              <a:defRPr sz="1300">
+                <a:solidFill>
+                  <a:srgbClr val="1A1A2E"/>
+                </a:solidFill>
+              </a:defRPr>
+            </a:pPr>
+            <a:r>
+              <a:t>  开机自启：systemd WantedBy / NSSM 延迟启动 / cron @reboot</a:t>
+            </a:r>
+          </a:p>
+          <a:p>
+            <a:pPr>
+              <a:lnSpc>
+                <a:spcPts val="140"/>
+              </a:lnSpc>
+              <a:spcAft>
+                <a:spcPts val="1200"/>
+              </a:spcAft>
+              <a:defRPr sz="1300">
+                <a:solidFill>
+                  <a:srgbClr val="1A1A2E"/>
+                </a:solidFill>
+              </a:defRPr>
+            </a:pPr>
+            <a:r>
+              <a:t>  崩溃自重启：on-failure / NSSM restart / watchdog tick</a:t>
+            </a:r>
+          </a:p>
+          <a:p>
+            <a:pPr>
+              <a:lnSpc>
+                <a:spcPts val="140"/>
+              </a:lnSpc>
+              <a:spcAft>
+                <a:spcPts val="1200"/>
+              </a:spcAft>
+              <a:defRPr sz="1300">
+                <a:solidFill>
+                  <a:srgbClr val="1A1A2E"/>
+                </a:solidFill>
+              </a:defRPr>
+            </a:pPr>
+            <a:r>
+              <a:t>  健康检查兜底：每 2 分钟检测，连续失败 3 次自动重启</a:t>
+            </a:r>
+          </a:p>
+        </p:txBody>
+      </p:sp>
+    </p:spTree>
+  </p:cSld>
+  <p:clrMapOvr>
+    <a:masterClrMapping/>
+  </p:clrMapOvr>
+</p:sld>
+</file>
+
+<file path=ppt/slides/slide22.xml><?xml version="1.0" encoding="utf-8"?>
+<p:sld xmlns:a="http://schemas.openxmlformats.org/drawingml/2006/main" xmlns:p="http://schemas.openxmlformats.org/presentationml/2006/main" xmlns:r="http://schemas.openxmlformats.org/officeDocument/2006/relationships">
+  <p:cSld>
+    <p:spTree>
+      <p:nvGrpSpPr>
+        <p:cNvPr id="1" name=""/>
+        <p:cNvGrpSpPr/>
+        <p:nvPr/>
+      </p:nvGrpSpPr>
+      <p:grpSpPr/>
+      <p:sp>
+        <p:nvSpPr>
+          <p:cNvPr id="2" name="Rectangle 1"/>
+          <p:cNvSpPr/>
+          <p:nvPr/>
+        </p:nvSpPr>
+        <p:spPr>
+          <a:xfrm>
+            <a:off x="0" y="0"/>
+            <a:ext cx="12191695" cy="914400"/>
+          </a:xfrm>
+          <a:prstGeom prst="rect">
+            <a:avLst/>
+          </a:prstGeom>
+          <a:solidFill>
+            <a:srgbClr val="0B3D91"/>
+          </a:solidFill>
+          <a:ln>
+            <a:noFill/>
+          </a:ln>
+        </p:spPr>
+        <p:style>
+          <a:lnRef idx="1">
+            <a:schemeClr val="accent1"/>
+          </a:lnRef>
+          <a:fillRef idx="3">
+            <a:schemeClr val="accent1"/>
+          </a:fillRef>
+          <a:effectRef idx="2">
+            <a:schemeClr val="accent1"/>
+          </a:effectRef>
+          <a:fontRef idx="minor">
+            <a:schemeClr val="lt1"/>
+          </a:fontRef>
+        </p:style>
+        <p:txBody>
+          <a:bodyPr rtlCol="0" anchor="ctr"/>
+          <a:lstStyle/>
+          <a:p>
+            <a:pPr algn="ctr"/>
+          </a:p>
+        </p:txBody>
+      </p:sp>
+      <p:sp>
+        <p:nvSpPr>
+          <p:cNvPr id="3" name="TextBox 2"/>
+          <p:cNvSpPr txBox="1"/>
+          <p:nvPr/>
+        </p:nvSpPr>
+        <p:spPr>
+          <a:xfrm>
+            <a:off x="457200" y="137160"/>
+            <a:ext cx="7315200" cy="640080"/>
+          </a:xfrm>
+          <a:prstGeom prst="rect">
+            <a:avLst/>
+          </a:prstGeom>
+          <a:noFill/>
+        </p:spPr>
+        <p:txBody>
+          <a:bodyPr wrap="none">
+            <a:spAutoFit/>
+          </a:bodyPr>
+          <a:lstStyle/>
+          <a:p>
+            <a:pPr>
+              <a:defRPr sz="2800" b="1">
+                <a:solidFill>
+                  <a:srgbClr val="FFFFFF"/>
+                </a:solidFill>
+              </a:defRPr>
+            </a:pPr>
+            <a:r>
+              <a:t>系统配置</a:t>
+            </a:r>
+          </a:p>
+        </p:txBody>
+      </p:sp>
+      <p:sp>
+        <p:nvSpPr>
+          <p:cNvPr id="4" name="TextBox 3"/>
+          <p:cNvSpPr txBox="1"/>
+          <p:nvPr/>
+        </p:nvSpPr>
+        <p:spPr>
+          <a:xfrm>
+            <a:off x="457200" y="502920"/>
+            <a:ext cx="7315200" cy="365760"/>
+          </a:xfrm>
+          <a:prstGeom prst="rect">
+            <a:avLst/>
+          </a:prstGeom>
+          <a:noFill/>
+        </p:spPr>
+        <p:txBody>
+          <a:bodyPr wrap="none">
+            <a:spAutoFit/>
+          </a:bodyPr>
+          <a:lstStyle/>
+          <a:p>
+            <a:pPr>
+              <a:defRPr sz="1200">
+                <a:solidFill>
+                  <a:srgbClr val="90CAF9"/>
+                </a:solidFill>
+              </a:defRPr>
+            </a:pPr>
+            <a:r>
+              <a:t>System Configuration</a:t>
+            </a:r>
+          </a:p>
+        </p:txBody>
+      </p:sp>
+      <p:pic>
+        <p:nvPicPr>
+          <p:cNvPr id="5" name="Picture 4" descr="14_system_config.png"/>
+          <p:cNvPicPr>
+            <a:picLocks noChangeAspect="1"/>
+          </p:cNvPicPr>
+          <p:nvPr/>
+        </p:nvPicPr>
+        <p:blipFill>
+          <a:blip r:embed="rId2"/>
+          <a:stretch>
+            <a:fillRect/>
+          </a:stretch>
+        </p:blipFill>
+        <p:spPr>
+          <a:xfrm>
+            <a:off x="365760" y="1325880"/>
+            <a:ext cx="4613141" cy="5029200"/>
+          </a:xfrm>
+          <a:prstGeom prst="rect">
+            <a:avLst/>
+          </a:prstGeom>
+        </p:spPr>
+      </p:pic>
+      <p:sp>
+        <p:nvSpPr>
+          <p:cNvPr id="6" name="Rectangle 5"/>
+          <p:cNvSpPr/>
+          <p:nvPr/>
+        </p:nvSpPr>
+        <p:spPr>
+          <a:xfrm>
+            <a:off x="8321040" y="1097280"/>
+            <a:ext cx="3657600" cy="5303520"/>
+          </a:xfrm>
+          <a:prstGeom prst="rect">
+            <a:avLst/>
+          </a:prstGeom>
+          <a:solidFill>
+            <a:srgbClr val="F5F7FA"/>
+          </a:solidFill>
+          <a:ln>
+            <a:noFill/>
+          </a:ln>
+        </p:spPr>
+        <p:style>
+          <a:lnRef idx="1">
+            <a:schemeClr val="accent1"/>
+          </a:lnRef>
+          <a:fillRef idx="3">
+            <a:schemeClr val="accent1"/>
+          </a:fillRef>
+          <a:effectRef idx="2">
+            <a:schemeClr val="accent1"/>
+          </a:effectRef>
+          <a:fontRef idx="minor">
+            <a:schemeClr val="lt1"/>
+          </a:fontRef>
+        </p:style>
+        <p:txBody>
+          <a:bodyPr rtlCol="0" anchor="ctr"/>
+          <a:lstStyle/>
+          <a:p>
+            <a:pPr algn="ctr"/>
+          </a:p>
+        </p:txBody>
+      </p:sp>
+      <p:sp>
+        <p:nvSpPr>
+          <p:cNvPr id="7" name="TextBox 6"/>
+          <p:cNvSpPr txBox="1"/>
+          <p:nvPr/>
+        </p:nvSpPr>
+        <p:spPr>
+          <a:xfrm>
+            <a:off x="8412480" y="1280160"/>
+            <a:ext cx="3474720" cy="457200"/>
+          </a:xfrm>
+          <a:prstGeom prst="rect">
+            <a:avLst/>
+          </a:prstGeom>
+          <a:noFill/>
+        </p:spPr>
+        <p:txBody>
+          <a:bodyPr wrap="none">
+            <a:spAutoFit/>
+          </a:bodyPr>
+          <a:lstStyle/>
+          <a:p>
+            <a:pPr>
+              <a:defRPr sz="1800" b="1">
+                <a:solidFill>
+                  <a:srgbClr val="0B3D91"/>
+                </a:solidFill>
+              </a:defRPr>
+            </a:pPr>
+            <a:r>
+              <a:t>功能亮点</a:t>
+            </a:r>
+          </a:p>
+        </p:txBody>
+      </p:sp>
+      <p:sp>
+        <p:nvSpPr>
+          <p:cNvPr id="8" name="TextBox 7"/>
+          <p:cNvSpPr txBox="1"/>
+          <p:nvPr/>
+        </p:nvSpPr>
+        <p:spPr>
+          <a:xfrm>
+            <a:off x="8412480" y="1828800"/>
+            <a:ext cx="3474720" cy="4572000"/>
+          </a:xfrm>
+          <a:prstGeom prst="rect">
+            <a:avLst/>
+          </a:prstGeom>
+          <a:noFill/>
+        </p:spPr>
+        <p:txBody>
+          <a:bodyPr wrap="square">
+            <a:spAutoFit/>
+          </a:bodyPr>
+          <a:lstStyle/>
+          <a:p>
+            <a:pPr>
+              <a:lnSpc>
+                <a:spcPts val="140"/>
+              </a:lnSpc>
+              <a:spcAft>
+                <a:spcPts val="1200"/>
+              </a:spcAft>
+              <a:defRPr sz="1300">
+                <a:solidFill>
+                  <a:srgbClr val="1A1A2E"/>
+                </a:solidFill>
+              </a:defRPr>
+            </a:pPr>
+            <a:r>
+              <a:t>  字典管理：自定义厂区、区域、状态等选项</a:t>
+            </a:r>
+          </a:p>
+          <a:p>
+            <a:pPr>
+              <a:lnSpc>
+                <a:spcPts val="140"/>
+              </a:lnSpc>
+              <a:spcAft>
+                <a:spcPts val="1200"/>
+              </a:spcAft>
+              <a:defRPr sz="1300">
+                <a:solidFill>
+                  <a:srgbClr val="1A1A2E"/>
+                </a:solidFill>
+              </a:defRPr>
+            </a:pPr>
+            <a:r>
+              <a:t>  角色权限：精细化角色权限矩阵</a:t>
+            </a:r>
+          </a:p>
+          <a:p>
+            <a:pPr>
+              <a:lnSpc>
+                <a:spcPts val="140"/>
+              </a:lnSpc>
+              <a:spcAft>
+                <a:spcPts val="1200"/>
+              </a:spcAft>
+              <a:defRPr sz="1300">
+                <a:solidFill>
+                  <a:srgbClr val="1A1A2E"/>
+                </a:solidFill>
+              </a:defRPr>
+            </a:pPr>
+            <a:r>
+              <a:t>  用户管理：账号创建、强制改密、账户解锁</a:t>
+            </a:r>
+          </a:p>
+          <a:p>
+            <a:pPr>
+              <a:lnSpc>
+                <a:spcPts val="140"/>
+              </a:lnSpc>
+              <a:spcAft>
+                <a:spcPts val="1200"/>
+              </a:spcAft>
+              <a:defRPr sz="1300">
+                <a:solidFill>
+                  <a:srgbClr val="1A1A2E"/>
+                </a:solidFill>
+              </a:defRPr>
+            </a:pPr>
+            <a:r>
+              <a:t>  定时备份计划、一键备份/加密/恢复</a:t>
+            </a:r>
+          </a:p>
+        </p:txBody>
+      </p:sp>
+    </p:spTree>
+  </p:cSld>
+  <p:clrMapOvr>
+    <a:masterClrMapping/>
+  </p:clrMapOvr>
+</p:sld>
+</file>
+
+<file path=ppt/slides/slide23.xml><?xml version="1.0" encoding="utf-8"?>
 <p:sld xmlns:a="http://schemas.openxmlformats.org/drawingml/2006/main" xmlns:p="http://schemas.openxmlformats.org/presentationml/2006/main" xmlns:r="http://schemas.openxmlformats.org/officeDocument/2006/relationships">
   <p:cSld>
     <p:spTree>
